--- a/references_files/pptx/uparrow.pptx
+++ b/references_files/pptx/uparrow.pptx
@@ -2957,6 +2957,14 @@
 <file path=ppt/slides/slide1.xml><?xml version="1.0" encoding="utf-8"?>
 <p:sld xmlns:a="http://schemas.openxmlformats.org/drawingml/2006/main" xmlns:r="http://schemas.openxmlformats.org/officeDocument/2006/relationships" xmlns:p="http://schemas.openxmlformats.org/presentationml/2006/main">
   <p:cSld>
+    <p:bg>
+      <p:bgPr>
+        <a:solidFill>
+          <a:srgbClr val="084149"/>
+        </a:solidFill>
+        <a:effectLst/>
+      </p:bgPr>
+    </p:bg>
     <p:spTree>
       <p:nvGrpSpPr>
         <p:cNvPr id="1" name=""/>
@@ -3012,7 +3020,7 @@
               <a:avLst/>
             </a:prstGeom>
             <a:solidFill>
-              <a:schemeClr val="tx1"/>
+              <a:schemeClr val="bg1"/>
             </a:solidFill>
             <a:ln>
               <a:noFill/>
@@ -3064,7 +3072,7 @@
               <a:avLst/>
             </a:prstGeom>
             <a:solidFill>
-              <a:schemeClr val="bg1"/>
+              <a:srgbClr val="084149"/>
             </a:solidFill>
             <a:ln>
               <a:noFill/>
